--- a/modulo-05/05.10 - Examinando o Modelo de Programação Flexível (FPM)/05.10_Flexible_Programming_Model.pptx
+++ b/modulo-05/05.10 - Examinando o Modelo de Programação Flexível (FPM)/05.10_Flexible_Programming_Model.pptx
@@ -1639,7 +1639,7 @@
                   <a:srgbClr val="8FA3C7"/>
                 </a:solidFill>
               </a:rPr>
-              <a:t>ABAP Moderno · Módulo 03 — SAP Fiori Elements com OData V4  ·  Aula 10 de 11 — Programação flexível</a:t>
+              <a:t>ABAP Moderno · Módulo 05 — SAP Fiori Elements com OData V4  ·  Aula 10 de 11 — Programação flexível</a:t>
             </a:r>
             <a:endParaRPr lang="en-US" sz="900" dirty="0"/>
           </a:p>
@@ -1785,7 +1785,7 @@
                   <a:srgbClr val="556B82"/>
                 </a:solidFill>
               </a:rPr>
-              <a:t>ABAP Moderno · Módulo 03 — SAP Fiori Elements com OData V4  ·  Aula 10 de 11 — Programação flexível</a:t>
+              <a:t>ABAP Moderno · Módulo 05 — SAP Fiori Elements com OData V4  ·  Aula 10 de 11 — Programação flexível</a:t>
             </a:r>
             <a:endParaRPr lang="en-US" sz="900" dirty="0"/>
           </a:p>
@@ -2216,7 +2216,7 @@
                   <a:srgbClr val="89D1FF"/>
                 </a:solidFill>
               </a:rPr>
-              <a:t>MÓDULO 03 · AULA 10 DE 11</a:t>
+              <a:t>MÓDULO 05 · AULA 10 DE 11</a:t>
             </a:r>
             <a:endParaRPr lang="en-US" sz="1400" dirty="0"/>
           </a:p>
@@ -2646,7 +2646,7 @@
                   <a:srgbClr val="8FA3C7"/>
                 </a:solidFill>
               </a:rPr>
-              <a:t>ABAP Moderno · Módulo 03 — SAP Fiori Elements com OData V4 · Design System SAP Horizon</a:t>
+              <a:t>ABAP Moderno · Módulo 05 — SAP Fiori Elements com OData V4 · Design System SAP Horizon</a:t>
             </a:r>
             <a:endParaRPr lang="en-US" sz="1100" dirty="0"/>
           </a:p>
@@ -2753,7 +2753,7 @@
                   <a:srgbClr val="89D1FF"/>
                 </a:solidFill>
               </a:rPr>
-              <a:t>AULA 03.10 · SEÇÃO 4</a:t>
+              <a:t>AULA 05.10 · SEÇÃO 4</a:t>
             </a:r>
             <a:endParaRPr lang="en-US" sz="1300" dirty="0"/>
           </a:p>
@@ -3228,7 +3228,7 @@
                   <a:srgbClr val="1D2D3E"/>
                 </a:solidFill>
               </a:rPr>
-              <a:t>Validar antes de salvar a viagem</a:t>
+              <a:t>Validar antes de salvar o pedido</a:t>
             </a:r>
             <a:endParaRPr lang="en-US" sz="2800" dirty="0"/>
           </a:p>
@@ -3353,7 +3353,7 @@
                   <a:srgbClr val="FFFFFF"/>
                 </a:solidFill>
               </a:rPr>
-              <a:t>webapp/ext/controller/TravelOP.controller.js</a:t>
+              <a:t>webapp/ext/controller/PedidoOP.controller.js</a:t>
             </a:r>
             <a:endParaRPr lang="en-US" sz="950" dirty="0"/>
           </a:p>
@@ -3389,7 +3389,7 @@
                   <a:srgbClr val="9DA5B4"/>
                 </a:solidFill>
               </a:rPr>
-              <a:t>travels › webapp › ext</a:t>
+              <a:t>pedidos-compras › webapp › ext (proposta)</a:t>
             </a:r>
             <a:endParaRPr lang="en-US" sz="850" dirty="0"/>
           </a:p>
@@ -4095,7 +4095,7 @@
                 <a:ea typeface="Courier New" pitchFamily="34" charset="-122"/>
                 <a:cs typeface="Courier New" pitchFamily="34" charset="-120"/>
               </a:rPr>
-              <a:t>"travels.ext.controller.TravelOP", {</a:t>
+              <a:t>"pedidoscompras.ext.controller.PedidoOP", {</a:t>
             </a:r>
             <a:endParaRPr lang="en-US" sz="900" dirty="0"/>
           </a:p>
@@ -5875,7 +5875,26 @@
                   <a:srgbClr val="556B82"/>
                 </a:solidFill>
               </a:rPr>
-              <a:t>Validações de negócio continuam no BO RAP.</a:t>
+              <a:t>Validações de negócio continuam no BO RAP, como </a:t>
+            </a:r>
+            <a:r>
+              <a:rPr lang="en-US" sz="1050" dirty="0">
+                <a:solidFill>
+                  <a:srgbClr val="0064D9"/>
+                </a:solidFill>
+                <a:latin typeface="Courier New" pitchFamily="34" charset="0"/>
+                <a:ea typeface="Courier New" pitchFamily="34" charset="-122"/>
+                <a:cs typeface="Courier New" pitchFamily="34" charset="-120"/>
+              </a:rPr>
+              <a:t>ValidarRegistro</a:t>
+            </a:r>
+            <a:r>
+              <a:rPr lang="en-US" sz="1050" dirty="0">
+                <a:solidFill>
+                  <a:srgbClr val="556B82"/>
+                </a:solidFill>
+              </a:rPr>
+              <a:t> no pedido.</a:t>
             </a:r>
             <a:endParaRPr lang="en-US" sz="1400" dirty="0"/>
           </a:p>
@@ -6017,7 +6036,7 @@
                   <a:srgbClr val="FFFFFF"/>
                 </a:solidFill>
               </a:rPr>
-              <a:t>O que aprendemos na aula 03.10</a:t>
+              <a:t>O que aprendemos na aula 05.10</a:t>
             </a:r>
             <a:endParaRPr lang="en-US" sz="3200" dirty="0"/>
           </a:p>
@@ -6525,7 +6544,7 @@
                   <a:srgbClr val="89D1FF"/>
                 </a:solidFill>
               </a:rPr>
-              <a:t>Próxima aula · 03.11  </a:t>
+              <a:t>Próxima aula · 05.11  </a:t>
             </a:r>
             <a:r>
               <a:rPr lang="en-US" sz="1500" dirty="0">
@@ -6579,7 +6598,7 @@
         </p:blipFill>
         <p:spPr>
           <a:xfrm>
-            <a:off x="822960" y="2926080"/>
+            <a:off x="6355080" y="1965960"/>
             <a:ext cx="256032" cy="256032"/>
           </a:xfrm>
           <a:prstGeom prst="rect">
@@ -6603,7 +6622,7 @@
         </p:blipFill>
         <p:spPr>
           <a:xfrm>
-            <a:off x="6355080" y="1965960"/>
+            <a:off x="822960" y="2926080"/>
             <a:ext cx="256032" cy="256032"/>
           </a:xfrm>
           <a:prstGeom prst="rect">
@@ -6802,7 +6821,7 @@
                   <a:srgbClr val="1D2D3E"/>
                 </a:solidFill>
               </a:rPr>
-              <a:t>Módulo 03 em 11 aulas: Fiori Elements com OData V4</a:t>
+              <a:t>Módulo 05 em 11 aulas: Fiori Elements com OData V4</a:t>
             </a:r>
             <a:endParaRPr lang="en-US" sz="2800" dirty="0"/>
           </a:p>
@@ -8672,7 +8691,7 @@
                   <a:srgbClr val="1D2D3E"/>
                 </a:solidFill>
               </a:rPr>
-              <a:t>adicionamos ao app de viagens uma seção Itinerary com mapa e uma mensagem montada com building blocks.</a:t>
+              <a:t>propomos ao app Pedidos de Compras uma seção Entrega com o mapa do endereço e uma mensagem montada com building blocks (o projeto ainda não usa extensões).</a:t>
             </a:r>
             <a:endParaRPr lang="en-US" sz="1400" dirty="0"/>
           </a:p>
@@ -8694,7 +8713,7 @@
         </p:blipFill>
         <p:spPr>
           <a:xfrm>
-            <a:off x="1696669" y="1847088"/>
+            <a:off x="3576218" y="1847088"/>
             <a:ext cx="347472" cy="347472"/>
           </a:xfrm>
           <a:prstGeom prst="rect">
@@ -8718,7 +8737,7 @@
         </p:blipFill>
         <p:spPr>
           <a:xfrm>
-            <a:off x="3576218" y="1847088"/>
+            <a:off x="1696669" y="1847088"/>
             <a:ext cx="347472" cy="347472"/>
           </a:xfrm>
           <a:prstGeom prst="rect">
@@ -8766,7 +8785,7 @@
         </p:blipFill>
         <p:spPr>
           <a:xfrm>
-            <a:off x="9214866" y="1847088"/>
+            <a:off x="11094415" y="1847088"/>
             <a:ext cx="347472" cy="347472"/>
           </a:xfrm>
           <a:prstGeom prst="rect">
@@ -8814,7 +8833,7 @@
         </p:blipFill>
         <p:spPr>
           <a:xfrm>
-            <a:off x="11094415" y="1847088"/>
+            <a:off x="9214866" y="1847088"/>
             <a:ext cx="347472" cy="347472"/>
           </a:xfrm>
           <a:prstGeom prst="rect">
@@ -8862,7 +8881,7 @@
         </p:blipFill>
         <p:spPr>
           <a:xfrm>
-            <a:off x="5455768" y="3858768"/>
+            <a:off x="3576218" y="3858768"/>
             <a:ext cx="347472" cy="347472"/>
           </a:xfrm>
           <a:prstGeom prst="rect">
@@ -8886,7 +8905,7 @@
         </p:blipFill>
         <p:spPr>
           <a:xfrm>
-            <a:off x="3576218" y="3858768"/>
+            <a:off x="5455768" y="3858768"/>
             <a:ext cx="347472" cy="347472"/>
           </a:xfrm>
           <a:prstGeom prst="rect">
@@ -9613,8 +9632,8 @@
         </p:blipFill>
         <p:spPr>
           <a:xfrm>
-            <a:off x="877824" y="2792063"/>
-            <a:ext cx="256032" cy="256032"/>
+            <a:off x="749808" y="4962049"/>
+            <a:ext cx="310896" cy="310896"/>
           </a:xfrm>
           <a:prstGeom prst="rect">
             <a:avLst/>
@@ -9637,7 +9656,7 @@
         </p:blipFill>
         <p:spPr>
           <a:xfrm>
-            <a:off x="6562192" y="2792063"/>
+            <a:off x="877824" y="2792063"/>
             <a:ext cx="256032" cy="256032"/>
           </a:xfrm>
           <a:prstGeom prst="rect">
@@ -9661,8 +9680,8 @@
         </p:blipFill>
         <p:spPr>
           <a:xfrm>
-            <a:off x="749808" y="4962049"/>
-            <a:ext cx="310896" cy="310896"/>
+            <a:off x="6562192" y="2792063"/>
+            <a:ext cx="256032" cy="256032"/>
           </a:xfrm>
           <a:prstGeom prst="rect">
             <a:avLst/>
@@ -9791,7 +9810,7 @@
                   <a:srgbClr val="89D1FF"/>
                 </a:solidFill>
               </a:rPr>
-              <a:t>AULA 03.10 · SEÇÃO 1</a:t>
+              <a:t>AULA 05.10 · SEÇÃO 1</a:t>
             </a:r>
             <a:endParaRPr lang="en-US" sz="1300" dirty="0"/>
           </a:p>
@@ -10700,7 +10719,7 @@
         </p:blipFill>
         <p:spPr>
           <a:xfrm>
-            <a:off x="850392" y="2768727"/>
+            <a:off x="8399069" y="2768727"/>
             <a:ext cx="256032" cy="256032"/>
           </a:xfrm>
           <a:prstGeom prst="rect">
@@ -10724,7 +10743,7 @@
         </p:blipFill>
         <p:spPr>
           <a:xfrm>
-            <a:off x="4624730" y="2768727"/>
+            <a:off x="850392" y="2768727"/>
             <a:ext cx="256032" cy="256032"/>
           </a:xfrm>
           <a:prstGeom prst="rect">
@@ -10748,7 +10767,7 @@
         </p:blipFill>
         <p:spPr>
           <a:xfrm>
-            <a:off x="8399069" y="2768727"/>
+            <a:off x="4624730" y="2768727"/>
             <a:ext cx="256032" cy="256032"/>
           </a:xfrm>
           <a:prstGeom prst="rect">
@@ -10902,7 +10921,7 @@
                   <a:srgbClr val="89D1FF"/>
                 </a:solidFill>
               </a:rPr>
-              <a:t>AULA 03.10 · SEÇÃO 2</a:t>
+              <a:t>AULA 05.10 · SEÇÃO 2</a:t>
             </a:r>
             <a:endParaRPr lang="en-US" sz="1300" dirty="0"/>
           </a:p>
@@ -11377,7 +11396,7 @@
                   <a:srgbClr val="0064D9"/>
                 </a:solidFill>
               </a:rPr>
-              <a:t>EXTENSÕES · EXERCÍCIO DO CURSO</a:t>
+              <a:t>EXTENSÕES · EXERCÍCIO PROPOSTO</a:t>
             </a:r>
             <a:endParaRPr lang="en-US" sz="1100" dirty="0"/>
           </a:p>
@@ -11415,7 +11434,7 @@
                   <a:srgbClr val="1D2D3E"/>
                 </a:solidFill>
               </a:rPr>
-              <a:t>Uma seção Itinerary com mapa</a:t>
+              <a:t>Uma seção Entrega com mapa</a:t>
             </a:r>
             <a:endParaRPr lang="en-US" sz="2800" dirty="0"/>
           </a:p>
@@ -11893,7 +11912,7 @@
                 <a:ea typeface="Courier New" pitchFamily="34" charset="-122"/>
                 <a:cs typeface="Courier New" pitchFamily="34" charset="-120"/>
               </a:rPr>
-              <a:t>"Itinerary": {</a:t>
+              <a:t>"Entrega": {</a:t>
             </a:r>
             <a:endParaRPr lang="en-US" sz="1050" dirty="0"/>
           </a:p>
@@ -11924,7 +11943,7 @@
                 <a:ea typeface="Courier New" pitchFamily="34" charset="-122"/>
                 <a:cs typeface="Courier New" pitchFamily="34" charset="-120"/>
               </a:rPr>
-              <a:t>"template": "travels.ext.fragment.GeoMap",</a:t>
+              <a:t>"template": "pedidoscompras.ext.fragment.Entrega",</a:t>
             </a:r>
             <a:endParaRPr lang="en-US" sz="1050" dirty="0"/>
           </a:p>
@@ -11955,7 +11974,7 @@
                 <a:ea typeface="Courier New" pitchFamily="34" charset="-122"/>
                 <a:cs typeface="Courier New" pitchFamily="34" charset="-120"/>
               </a:rPr>
-              <a:t>"title": "Itinerary",</a:t>
+              <a:t>"title": "Entrega",</a:t>
             </a:r>
             <a:endParaRPr lang="en-US" sz="1050" dirty="0"/>
           </a:p>
@@ -12048,7 +12067,7 @@
                 <a:ea typeface="Courier New" pitchFamily="34" charset="-122"/>
                 <a:cs typeface="Courier New" pitchFamily="34" charset="-120"/>
               </a:rPr>
-              <a:t>"anchor": "Bookings"</a:t>
+              <a:t>"anchor": "Itens"</a:t>
             </a:r>
             <a:endParaRPr lang="en-US" sz="1050" dirty="0"/>
           </a:p>
@@ -12210,7 +12229,7 @@
                   <a:srgbClr val="556B82"/>
                 </a:solidFill>
               </a:rPr>
-              <a:t>Registrado nas settings da Object Page do Travel; o Page Editor escreve isto.</a:t>
+              <a:t>Registrado nas settings da Object Page do Pedido; o Page Editor escreve isto.</a:t>
             </a:r>
             <a:endParaRPr lang="en-US" sz="1400" dirty="0"/>
           </a:p>
@@ -12332,7 +12351,7 @@
         <p:spPr>
           <a:xfrm>
             <a:off x="6324448" y="2084832"/>
-            <a:ext cx="3396996" cy="292608"/>
+            <a:ext cx="3474720" cy="292608"/>
           </a:xfrm>
           <a:prstGeom prst="rect">
             <a:avLst/>
@@ -12352,7 +12371,7 @@
         <p:spPr>
           <a:xfrm>
             <a:off x="6324448" y="2084832"/>
-            <a:ext cx="3396996" cy="27432"/>
+            <a:ext cx="3474720" cy="27432"/>
           </a:xfrm>
           <a:prstGeom prst="rect">
             <a:avLst/>
@@ -12372,7 +12391,7 @@
         <p:spPr>
           <a:xfrm>
             <a:off x="6415888" y="2103120"/>
-            <a:ext cx="3214116" cy="274320"/>
+            <a:ext cx="3291840" cy="274320"/>
           </a:xfrm>
           <a:prstGeom prst="rect">
             <a:avLst/>
@@ -12393,7 +12412,7 @@
                   <a:srgbClr val="FFFFFF"/>
                 </a:solidFill>
               </a:rPr>
-              <a:t>webapp/ext/fragment/GeoMap.fragment.xml</a:t>
+              <a:t>webapp/ext/fragment/Entrega.fragment.xml</a:t>
             </a:r>
             <a:endParaRPr lang="en-US" sz="950" dirty="0"/>
           </a:p>
@@ -13001,7 +13020,7 @@
                 <a:ea typeface="Courier New" pitchFamily="34" charset="-122"/>
                 <a:cs typeface="Courier New" pitchFamily="34" charset="-120"/>
               </a:rPr>
-              <a:t>"geoMap"</a:t>
+              <a:t>"mapaEntrega"</a:t>
             </a:r>
             <a:endParaRPr lang="en-US" sz="1050" dirty="0"/>
           </a:p>
@@ -13140,7 +13159,7 @@
                 <a:ea typeface="Courier New" pitchFamily="34" charset="-122"/>
                 <a:cs typeface="Courier New" pitchFamily="34" charset="-120"/>
               </a:rPr>
-              <a:t>rotas</a:t>
+              <a:t>ponto</a:t>
             </a:r>
             <a:r>
               <a:rPr lang="en-US" sz="1050" dirty="0">
@@ -13162,7 +13181,7 @@
                 <a:ea typeface="Courier New" pitchFamily="34" charset="-122"/>
                 <a:cs typeface="Courier New" pitchFamily="34" charset="-120"/>
               </a:rPr>
-              <a:t>e</a:t>
+              <a:t>do</a:t>
             </a:r>
             <a:r>
               <a:rPr lang="en-US" sz="1050" dirty="0">
@@ -13184,7 +13203,7 @@
                 <a:ea typeface="Courier New" pitchFamily="34" charset="-122"/>
                 <a:cs typeface="Courier New" pitchFamily="34" charset="-120"/>
               </a:rPr>
-              <a:t>pontos</a:t>
+              <a:t>endere</a:t>
             </a:r>
             <a:r>
               <a:rPr lang="en-US" sz="1050" dirty="0">
@@ -13195,6 +13214,28 @@
                 <a:ea typeface="Courier New" pitchFamily="34" charset="-122"/>
                 <a:cs typeface="Courier New" pitchFamily="34" charset="-120"/>
               </a:rPr>
+              <a:t>ç</a:t>
+            </a:r>
+            <a:r>
+              <a:rPr lang="en-US" sz="1050" dirty="0">
+                <a:solidFill>
+                  <a:srgbClr val="CCCCCC"/>
+                </a:solidFill>
+                <a:latin typeface="Courier New" pitchFamily="34" charset="0"/>
+                <a:ea typeface="Courier New" pitchFamily="34" charset="-122"/>
+                <a:cs typeface="Courier New" pitchFamily="34" charset="-120"/>
+              </a:rPr>
+              <a:t>o</a:t>
+            </a:r>
+            <a:r>
+              <a:rPr lang="en-US" sz="1050" dirty="0">
+                <a:solidFill>
+                  <a:srgbClr val="CCCCCC"/>
+                </a:solidFill>
+                <a:latin typeface="Courier New" pitchFamily="34" charset="0"/>
+                <a:ea typeface="Courier New" pitchFamily="34" charset="-122"/>
+                <a:cs typeface="Courier New" pitchFamily="34" charset="-120"/>
+              </a:rPr>
               <a:t> </a:t>
             </a:r>
             <a:r>
@@ -13206,7 +13247,7 @@
                 <a:ea typeface="Courier New" pitchFamily="34" charset="-122"/>
                 <a:cs typeface="Courier New" pitchFamily="34" charset="-120"/>
               </a:rPr>
-              <a:t>do</a:t>
+              <a:t>de</a:t>
             </a:r>
             <a:r>
               <a:rPr lang="en-US" sz="1050" dirty="0">
@@ -13228,29 +13269,7 @@
                 <a:ea typeface="Courier New" pitchFamily="34" charset="-122"/>
                 <a:cs typeface="Courier New" pitchFamily="34" charset="-120"/>
               </a:rPr>
-              <a:t>itiner</a:t>
-            </a:r>
-            <a:r>
-              <a:rPr lang="en-US" sz="1050" dirty="0">
-                <a:solidFill>
-                  <a:srgbClr val="CCCCCC"/>
-                </a:solidFill>
-                <a:latin typeface="Courier New" pitchFamily="34" charset="0"/>
-                <a:ea typeface="Courier New" pitchFamily="34" charset="-122"/>
-                <a:cs typeface="Courier New" pitchFamily="34" charset="-120"/>
-              </a:rPr>
-              <a:t>á</a:t>
-            </a:r>
-            <a:r>
-              <a:rPr lang="en-US" sz="1050" dirty="0">
-                <a:solidFill>
-                  <a:srgbClr val="CCCCCC"/>
-                </a:solidFill>
-                <a:latin typeface="Courier New" pitchFamily="34" charset="0"/>
-                <a:ea typeface="Courier New" pitchFamily="34" charset="-122"/>
-                <a:cs typeface="Courier New" pitchFamily="34" charset="-120"/>
-              </a:rPr>
-              <a:t>rio</a:t>
+              <a:t>entrega</a:t>
             </a:r>
             <a:r>
               <a:rPr lang="en-US" sz="1050" dirty="0">
@@ -13650,7 +13669,7 @@
                   <a:srgbClr val="89D1FF"/>
                 </a:solidFill>
               </a:rPr>
-              <a:t>AULA 03.10 · SEÇÃO 3</a:t>
+              <a:t>AULA 05.10 · SEÇÃO 3</a:t>
             </a:r>
             <a:endParaRPr lang="en-US" sz="1300" dirty="0"/>
           </a:p>
@@ -14071,7 +14090,7 @@
                   <a:srgbClr val="0064D9"/>
                 </a:solidFill>
               </a:rPr>
-              <a:t>BUILDING BLOCKS · EXERCÍCIO DO CURSO</a:t>
+              <a:t>BUILDING BLOCKS · EXERCÍCIO PROPOSTO</a:t>
             </a:r>
             <a:endParaRPr lang="en-US" sz="1100" dirty="0"/>
           </a:p>
@@ -14173,7 +14192,7 @@
         <p:spPr>
           <a:xfrm>
             <a:off x="640080" y="1700784"/>
-            <a:ext cx="3396996" cy="292608"/>
+            <a:ext cx="3474720" cy="292608"/>
           </a:xfrm>
           <a:prstGeom prst="rect">
             <a:avLst/>
@@ -14193,7 +14212,7 @@
         <p:spPr>
           <a:xfrm>
             <a:off x="640080" y="1700784"/>
-            <a:ext cx="3396996" cy="27432"/>
+            <a:ext cx="3474720" cy="27432"/>
           </a:xfrm>
           <a:prstGeom prst="rect">
             <a:avLst/>
@@ -14213,7 +14232,7 @@
         <p:spPr>
           <a:xfrm>
             <a:off x="731520" y="1719072"/>
-            <a:ext cx="3214116" cy="274320"/>
+            <a:ext cx="3291840" cy="274320"/>
           </a:xfrm>
           <a:prstGeom prst="rect">
             <a:avLst/>
@@ -14234,7 +14253,7 @@
                   <a:srgbClr val="FFFFFF"/>
                 </a:solidFill>
               </a:rPr>
-              <a:t>webapp/ext/fragment/GeoMap.fragment.xml</a:t>
+              <a:t>webapp/ext/fragment/Entrega.fragment.xml</a:t>
             </a:r>
             <a:endParaRPr lang="en-US" sz="950" dirty="0"/>
           </a:p>
@@ -14270,7 +14289,7 @@
                   <a:srgbClr val="9DA5B4"/>
                 </a:solidFill>
               </a:rPr>
-              <a:t>travels › webapp › ext</a:t>
+              <a:t>pedidos-compras › webapp › ext (proposta)</a:t>
             </a:r>
             <a:endParaRPr lang="en-US" sz="850" dirty="0"/>
           </a:p>
@@ -14940,7 +14959,7 @@
                 <a:ea typeface="Courier New" pitchFamily="34" charset="-122"/>
                 <a:cs typeface="Courier New" pitchFamily="34" charset="-120"/>
               </a:rPr>
-              <a:t>"The bookings were confirmed on" class="sapUiTinyMarginEnd"/&gt;</a:t>
+              <a:t>"Pedido registrado em" class="sapUiTinyMarginEnd"/&gt;</a:t>
             </a:r>
             <a:endParaRPr lang="en-US" sz="900" dirty="0"/>
           </a:p>
@@ -15048,7 +15067,7 @@
                 <a:ea typeface="Courier New" pitchFamily="34" charset="-122"/>
                 <a:cs typeface="Courier New" pitchFamily="34" charset="-120"/>
               </a:rPr>
-              <a:t>"custom-flightdate" metaPath="CreatedAt" readOnly="true"/&gt;</a:t>
+              <a:t>"custom-criado" metaPath="CreatedAt" readOnly="true"/&gt;</a:t>
             </a:r>
             <a:endParaRPr lang="en-US" sz="900" dirty="0"/>
           </a:p>
@@ -15134,7 +15153,7 @@
                 <a:ea typeface="Courier New" pitchFamily="34" charset="-122"/>
                 <a:cs typeface="Courier New" pitchFamily="34" charset="-120"/>
               </a:rPr>
-              <a:t>"by" class="sapUiTinyMarginBeginEnd"/&gt;</a:t>
+              <a:t>"para" class="sapUiTinyMarginBeginEnd"/&gt;</a:t>
             </a:r>
             <a:endParaRPr lang="en-US" sz="900" dirty="0"/>
           </a:p>
@@ -15242,7 +15261,7 @@
                 <a:ea typeface="Courier New" pitchFamily="34" charset="-122"/>
                 <a:cs typeface="Courier New" pitchFamily="34" charset="-120"/>
               </a:rPr>
-              <a:t>"custom-airline" metaPath="AgencyID" readOnly="true"/&gt;</a:t>
+              <a:t>"custom-cliente" metaPath="NomeCliente" readOnly="true"/&gt;</a:t>
             </a:r>
             <a:endParaRPr lang="en-US" sz="900" dirty="0"/>
           </a:p>
